--- a/期中/新增 Microsoft PowerPoint 簡報.pptx
+++ b/期中/新增 Microsoft PowerPoint 簡報.pptx
@@ -118,6 +118,11 @@
       </a:defRPr>
     </a:lvl9pPr>
   </p:defaultTextStyle>
+  <p:extLst>
+    <p:ext uri="{EFAFB233-063F-42B5-8137-9DF3F51BA10A}">
+      <p15:sldGuideLst xmlns:p15="http://schemas.microsoft.com/office/powerpoint/2012/main"/>
+    </p:ext>
+  </p:extLst>
 </p:presentation>
 </file>
 
@@ -268,7 +273,7 @@
           <a:p>
             <a:fld id="{06DA9058-667F-437E-B16C-7FCA97EF29A0}" type="datetimeFigureOut">
               <a:rPr lang="zh-TW" altLang="en-US" smtClean="0"/>
-              <a:t>2024/12/11</a:t>
+              <a:t>2024/12/13</a:t>
             </a:fld>
             <a:endParaRPr lang="zh-TW" altLang="en-US"/>
           </a:p>
@@ -466,7 +471,7 @@
           <a:p>
             <a:fld id="{06DA9058-667F-437E-B16C-7FCA97EF29A0}" type="datetimeFigureOut">
               <a:rPr lang="zh-TW" altLang="en-US" smtClean="0"/>
-              <a:t>2024/12/11</a:t>
+              <a:t>2024/12/13</a:t>
             </a:fld>
             <a:endParaRPr lang="zh-TW" altLang="en-US"/>
           </a:p>
@@ -674,7 +679,7 @@
           <a:p>
             <a:fld id="{06DA9058-667F-437E-B16C-7FCA97EF29A0}" type="datetimeFigureOut">
               <a:rPr lang="zh-TW" altLang="en-US" smtClean="0"/>
-              <a:t>2024/12/11</a:t>
+              <a:t>2024/12/13</a:t>
             </a:fld>
             <a:endParaRPr lang="zh-TW" altLang="en-US"/>
           </a:p>
@@ -872,7 +877,7 @@
           <a:p>
             <a:fld id="{06DA9058-667F-437E-B16C-7FCA97EF29A0}" type="datetimeFigureOut">
               <a:rPr lang="zh-TW" altLang="en-US" smtClean="0"/>
-              <a:t>2024/12/11</a:t>
+              <a:t>2024/12/13</a:t>
             </a:fld>
             <a:endParaRPr lang="zh-TW" altLang="en-US"/>
           </a:p>
@@ -1147,7 +1152,7 @@
           <a:p>
             <a:fld id="{06DA9058-667F-437E-B16C-7FCA97EF29A0}" type="datetimeFigureOut">
               <a:rPr lang="zh-TW" altLang="en-US" smtClean="0"/>
-              <a:t>2024/12/11</a:t>
+              <a:t>2024/12/13</a:t>
             </a:fld>
             <a:endParaRPr lang="zh-TW" altLang="en-US"/>
           </a:p>
@@ -1412,7 +1417,7 @@
           <a:p>
             <a:fld id="{06DA9058-667F-437E-B16C-7FCA97EF29A0}" type="datetimeFigureOut">
               <a:rPr lang="zh-TW" altLang="en-US" smtClean="0"/>
-              <a:t>2024/12/11</a:t>
+              <a:t>2024/12/13</a:t>
             </a:fld>
             <a:endParaRPr lang="zh-TW" altLang="en-US"/>
           </a:p>
@@ -1824,7 +1829,7 @@
           <a:p>
             <a:fld id="{06DA9058-667F-437E-B16C-7FCA97EF29A0}" type="datetimeFigureOut">
               <a:rPr lang="zh-TW" altLang="en-US" smtClean="0"/>
-              <a:t>2024/12/11</a:t>
+              <a:t>2024/12/13</a:t>
             </a:fld>
             <a:endParaRPr lang="zh-TW" altLang="en-US"/>
           </a:p>
@@ -1965,7 +1970,7 @@
           <a:p>
             <a:fld id="{06DA9058-667F-437E-B16C-7FCA97EF29A0}" type="datetimeFigureOut">
               <a:rPr lang="zh-TW" altLang="en-US" smtClean="0"/>
-              <a:t>2024/12/11</a:t>
+              <a:t>2024/12/13</a:t>
             </a:fld>
             <a:endParaRPr lang="zh-TW" altLang="en-US"/>
           </a:p>
@@ -2078,7 +2083,7 @@
           <a:p>
             <a:fld id="{06DA9058-667F-437E-B16C-7FCA97EF29A0}" type="datetimeFigureOut">
               <a:rPr lang="zh-TW" altLang="en-US" smtClean="0"/>
-              <a:t>2024/12/11</a:t>
+              <a:t>2024/12/13</a:t>
             </a:fld>
             <a:endParaRPr lang="zh-TW" altLang="en-US"/>
           </a:p>
@@ -2389,7 +2394,7 @@
           <a:p>
             <a:fld id="{06DA9058-667F-437E-B16C-7FCA97EF29A0}" type="datetimeFigureOut">
               <a:rPr lang="zh-TW" altLang="en-US" smtClean="0"/>
-              <a:t>2024/12/11</a:t>
+              <a:t>2024/12/13</a:t>
             </a:fld>
             <a:endParaRPr lang="zh-TW" altLang="en-US"/>
           </a:p>
@@ -2677,7 +2682,7 @@
           <a:p>
             <a:fld id="{06DA9058-667F-437E-B16C-7FCA97EF29A0}" type="datetimeFigureOut">
               <a:rPr lang="zh-TW" altLang="en-US" smtClean="0"/>
-              <a:t>2024/12/11</a:t>
+              <a:t>2024/12/13</a:t>
             </a:fld>
             <a:endParaRPr lang="zh-TW" altLang="en-US"/>
           </a:p>
@@ -2918,7 +2923,7 @@
           <a:p>
             <a:fld id="{06DA9058-667F-437E-B16C-7FCA97EF29A0}" type="datetimeFigureOut">
               <a:rPr lang="zh-TW" altLang="en-US" smtClean="0"/>
-              <a:t>2024/12/11</a:t>
+              <a:t>2024/12/13</a:t>
             </a:fld>
             <a:endParaRPr lang="zh-TW" altLang="en-US"/>
           </a:p>
